--- a/Verified Consulting — Demo Day.pptx
+++ b/Verified Consulting — Demo Day.pptx
@@ -1130,10 +1130,11 @@
             <a:r>
               <a:rPr lang="en-US" dirty="0"/>
               <a:t>DEMO ORDER — rehearse this exact path:
-1. Owner dashboard, real data source selected.
-2. Open a client with several placements (Houston Housing Authority has the most).
-3. Press Placements — add one, click Calculate, show the AVE agent.
-4. Log in as a client and show the same coverage from their side.
+1. Owner dashboard, real data source selected. SIGN IN WITH THE REAL SUPABASE OWNER ACCOUNT, not the demo link — the AVE research and discovery features are hidden on the mock login.
+2. Open SNAP Co. Use SNAP Co. specifically: all four of its outlets have sourced audience figures, so Calculate returns a real range. Houston Housing Authority has more placements but none of its outlets have figures yet, so the calculator falls through there.
+3. Press Placements — add one for Blavity News, click Calculate: it returns $3,416 – $37,913 with the source named. Then try QSR Magazine, which has no figure, and use Research this rate — it comes back with a sourced estimate from the outlet's own published ad rates.
+4. Tick 'save this rate for next time' — the next placement at that outlet returns the saved rate instantly. That arc is the whole feature.
+5. Log in as a client and show the same coverage from their side.
 If the network is unreliable, fall back to screenshots — have them open in a tab before you start.</a:t>
             </a:r>
             <a:endParaRPr lang="en-US" dirty="0"/>
